--- a/BottleNeck_Pipeline.pptx
+++ b/BottleNeck_Pipeline.pptx
@@ -124,6 +124,178 @@
     </p:ext>
   </p:extLst>
 </p:presentation>
+</file>
+
+<file path=ppt/revisionInfo.xml><?xml version="1.0" encoding="utf-8"?>
+<p1510:revInfo xmlns:a="http://schemas.openxmlformats.org/drawingml/2006/main" xmlns:r="http://schemas.openxmlformats.org/officeDocument/2006/relationships" xmlns:p1510="http://schemas.microsoft.com/office/powerpoint/2015/10/main">
+  <p1510:revLst>
+    <p1510:client id="{47BC2018-500B-49F3-8A1F-4C631E0467C3}" v="1" dt="2026-05-28T08:59:56.576"/>
+  </p1510:revLst>
+</p1510:revInfo>
+</file>
+
+<file path=ppt/changesInfos/changesInfo1.xml><?xml version="1.0" encoding="utf-8"?>
+<pc:chgInfo xmlns:a="http://schemas.openxmlformats.org/drawingml/2006/main" xmlns:r="http://schemas.openxmlformats.org/officeDocument/2006/relationships" xmlns:ac="http://schemas.microsoft.com/office/drawing/2013/main/command" xmlns:pc="http://schemas.microsoft.com/office/powerpoint/2013/main/command">
+  <pc:docChgLst>
+    <pc:chgData name="Magali COURTE  2702" userId="961317ee-03d6-4c84-93c6-c2df63a2da79" providerId="ADAL" clId="{FC6A9BC7-45D6-46BA-9B59-23110F03BC98}"/>
+    <pc:docChg chg="undo custSel modSld">
+      <pc:chgData name="Magali COURTE  2702" userId="961317ee-03d6-4c84-93c6-c2df63a2da79" providerId="ADAL" clId="{FC6A9BC7-45D6-46BA-9B59-23110F03BC98}" dt="2026-05-28T13:32:27.876" v="14" actId="1076"/>
+      <pc:docMkLst>
+        <pc:docMk/>
+      </pc:docMkLst>
+      <pc:sldChg chg="addSp modSp mod">
+        <pc:chgData name="Magali COURTE  2702" userId="961317ee-03d6-4c84-93c6-c2df63a2da79" providerId="ADAL" clId="{FC6A9BC7-45D6-46BA-9B59-23110F03BC98}" dt="2026-05-28T09:00:07.522" v="3" actId="255"/>
+        <pc:sldMkLst>
+          <pc:docMk/>
+          <pc:sldMk cId="0" sldId="256"/>
+        </pc:sldMkLst>
+        <pc:spChg chg="add mod">
+          <ac:chgData name="Magali COURTE  2702" userId="961317ee-03d6-4c84-93c6-c2df63a2da79" providerId="ADAL" clId="{FC6A9BC7-45D6-46BA-9B59-23110F03BC98}" dt="2026-05-28T09:00:07.522" v="3" actId="255"/>
+          <ac:spMkLst>
+            <pc:docMk/>
+            <pc:sldMk cId="0" sldId="256"/>
+            <ac:spMk id="11" creationId="{5B50DCF1-D9A1-26EA-79AB-182A4FFD65C3}"/>
+          </ac:spMkLst>
+        </pc:spChg>
+      </pc:sldChg>
+      <pc:sldChg chg="delSp modSp mod">
+        <pc:chgData name="Magali COURTE  2702" userId="961317ee-03d6-4c84-93c6-c2df63a2da79" providerId="ADAL" clId="{FC6A9BC7-45D6-46BA-9B59-23110F03BC98}" dt="2026-05-28T13:32:27.876" v="14" actId="1076"/>
+        <pc:sldMkLst>
+          <pc:docMk/>
+          <pc:sldMk cId="0" sldId="267"/>
+        </pc:sldMkLst>
+        <pc:spChg chg="mod">
+          <ac:chgData name="Magali COURTE  2702" userId="961317ee-03d6-4c84-93c6-c2df63a2da79" providerId="ADAL" clId="{FC6A9BC7-45D6-46BA-9B59-23110F03BC98}" dt="2026-05-28T13:32:27.876" v="14" actId="1076"/>
+          <ac:spMkLst>
+            <pc:docMk/>
+            <pc:sldMk cId="0" sldId="267"/>
+            <ac:spMk id="4" creationId="{00000000-0000-0000-0000-000000000000}"/>
+          </ac:spMkLst>
+        </pc:spChg>
+        <pc:spChg chg="mod">
+          <ac:chgData name="Magali COURTE  2702" userId="961317ee-03d6-4c84-93c6-c2df63a2da79" providerId="ADAL" clId="{FC6A9BC7-45D6-46BA-9B59-23110F03BC98}" dt="2026-05-28T13:32:27.876" v="14" actId="1076"/>
+          <ac:spMkLst>
+            <pc:docMk/>
+            <pc:sldMk cId="0" sldId="267"/>
+            <ac:spMk id="5" creationId="{00000000-0000-0000-0000-000000000000}"/>
+          </ac:spMkLst>
+        </pc:spChg>
+        <pc:spChg chg="mod">
+          <ac:chgData name="Magali COURTE  2702" userId="961317ee-03d6-4c84-93c6-c2df63a2da79" providerId="ADAL" clId="{FC6A9BC7-45D6-46BA-9B59-23110F03BC98}" dt="2026-05-28T13:32:27.876" v="14" actId="1076"/>
+          <ac:spMkLst>
+            <pc:docMk/>
+            <pc:sldMk cId="0" sldId="267"/>
+            <ac:spMk id="6" creationId="{00000000-0000-0000-0000-000000000000}"/>
+          </ac:spMkLst>
+        </pc:spChg>
+        <pc:spChg chg="mod">
+          <ac:chgData name="Magali COURTE  2702" userId="961317ee-03d6-4c84-93c6-c2df63a2da79" providerId="ADAL" clId="{FC6A9BC7-45D6-46BA-9B59-23110F03BC98}" dt="2026-05-28T13:32:27.876" v="14" actId="1076"/>
+          <ac:spMkLst>
+            <pc:docMk/>
+            <pc:sldMk cId="0" sldId="267"/>
+            <ac:spMk id="7" creationId="{00000000-0000-0000-0000-000000000000}"/>
+          </ac:spMkLst>
+        </pc:spChg>
+        <pc:spChg chg="del">
+          <ac:chgData name="Magali COURTE  2702" userId="961317ee-03d6-4c84-93c6-c2df63a2da79" providerId="ADAL" clId="{FC6A9BC7-45D6-46BA-9B59-23110F03BC98}" dt="2026-05-28T13:31:46.065" v="4" actId="478"/>
+          <ac:spMkLst>
+            <pc:docMk/>
+            <pc:sldMk cId="0" sldId="267"/>
+            <ac:spMk id="8" creationId="{00000000-0000-0000-0000-000000000000}"/>
+          </ac:spMkLst>
+        </pc:spChg>
+        <pc:spChg chg="del">
+          <ac:chgData name="Magali COURTE  2702" userId="961317ee-03d6-4c84-93c6-c2df63a2da79" providerId="ADAL" clId="{FC6A9BC7-45D6-46BA-9B59-23110F03BC98}" dt="2026-05-28T13:31:47.590" v="5" actId="478"/>
+          <ac:spMkLst>
+            <pc:docMk/>
+            <pc:sldMk cId="0" sldId="267"/>
+            <ac:spMk id="9" creationId="{00000000-0000-0000-0000-000000000000}"/>
+          </ac:spMkLst>
+        </pc:spChg>
+        <pc:spChg chg="del">
+          <ac:chgData name="Magali COURTE  2702" userId="961317ee-03d6-4c84-93c6-c2df63a2da79" providerId="ADAL" clId="{FC6A9BC7-45D6-46BA-9B59-23110F03BC98}" dt="2026-05-28T13:31:51.906" v="8" actId="478"/>
+          <ac:spMkLst>
+            <pc:docMk/>
+            <pc:sldMk cId="0" sldId="267"/>
+            <ac:spMk id="10" creationId="{00000000-0000-0000-0000-000000000000}"/>
+          </ac:spMkLst>
+        </pc:spChg>
+        <pc:spChg chg="del mod">
+          <ac:chgData name="Magali COURTE  2702" userId="961317ee-03d6-4c84-93c6-c2df63a2da79" providerId="ADAL" clId="{FC6A9BC7-45D6-46BA-9B59-23110F03BC98}" dt="2026-05-28T13:31:50.047" v="7" actId="478"/>
+          <ac:spMkLst>
+            <pc:docMk/>
+            <pc:sldMk cId="0" sldId="267"/>
+            <ac:spMk id="11" creationId="{00000000-0000-0000-0000-000000000000}"/>
+          </ac:spMkLst>
+        </pc:spChg>
+        <pc:spChg chg="del mod">
+          <ac:chgData name="Magali COURTE  2702" userId="961317ee-03d6-4c84-93c6-c2df63a2da79" providerId="ADAL" clId="{FC6A9BC7-45D6-46BA-9B59-23110F03BC98}" dt="2026-05-28T13:32:18.159" v="13" actId="478"/>
+          <ac:spMkLst>
+            <pc:docMk/>
+            <pc:sldMk cId="0" sldId="267"/>
+            <ac:spMk id="12" creationId="{00000000-0000-0000-0000-000000000000}"/>
+          </ac:spMkLst>
+        </pc:spChg>
+        <pc:spChg chg="del mod">
+          <ac:chgData name="Magali COURTE  2702" userId="961317ee-03d6-4c84-93c6-c2df63a2da79" providerId="ADAL" clId="{FC6A9BC7-45D6-46BA-9B59-23110F03BC98}" dt="2026-05-28T13:32:18.159" v="13" actId="478"/>
+          <ac:spMkLst>
+            <pc:docMk/>
+            <pc:sldMk cId="0" sldId="267"/>
+            <ac:spMk id="13" creationId="{00000000-0000-0000-0000-000000000000}"/>
+          </ac:spMkLst>
+        </pc:spChg>
+        <pc:spChg chg="del mod">
+          <ac:chgData name="Magali COURTE  2702" userId="961317ee-03d6-4c84-93c6-c2df63a2da79" providerId="ADAL" clId="{FC6A9BC7-45D6-46BA-9B59-23110F03BC98}" dt="2026-05-28T13:32:18.159" v="13" actId="478"/>
+          <ac:spMkLst>
+            <pc:docMk/>
+            <pc:sldMk cId="0" sldId="267"/>
+            <ac:spMk id="14" creationId="{00000000-0000-0000-0000-000000000000}"/>
+          </ac:spMkLst>
+        </pc:spChg>
+        <pc:spChg chg="del mod">
+          <ac:chgData name="Magali COURTE  2702" userId="961317ee-03d6-4c84-93c6-c2df63a2da79" providerId="ADAL" clId="{FC6A9BC7-45D6-46BA-9B59-23110F03BC98}" dt="2026-05-28T13:32:18.159" v="13" actId="478"/>
+          <ac:spMkLst>
+            <pc:docMk/>
+            <pc:sldMk cId="0" sldId="267"/>
+            <ac:spMk id="15" creationId="{00000000-0000-0000-0000-000000000000}"/>
+          </ac:spMkLst>
+        </pc:spChg>
+        <pc:spChg chg="mod">
+          <ac:chgData name="Magali COURTE  2702" userId="961317ee-03d6-4c84-93c6-c2df63a2da79" providerId="ADAL" clId="{FC6A9BC7-45D6-46BA-9B59-23110F03BC98}" dt="2026-05-28T13:32:27.876" v="14" actId="1076"/>
+          <ac:spMkLst>
+            <pc:docMk/>
+            <pc:sldMk cId="0" sldId="267"/>
+            <ac:spMk id="16" creationId="{00000000-0000-0000-0000-000000000000}"/>
+          </ac:spMkLst>
+        </pc:spChg>
+        <pc:spChg chg="mod">
+          <ac:chgData name="Magali COURTE  2702" userId="961317ee-03d6-4c84-93c6-c2df63a2da79" providerId="ADAL" clId="{FC6A9BC7-45D6-46BA-9B59-23110F03BC98}" dt="2026-05-28T13:32:27.876" v="14" actId="1076"/>
+          <ac:spMkLst>
+            <pc:docMk/>
+            <pc:sldMk cId="0" sldId="267"/>
+            <ac:spMk id="17" creationId="{00000000-0000-0000-0000-000000000000}"/>
+          </ac:spMkLst>
+        </pc:spChg>
+        <pc:spChg chg="mod">
+          <ac:chgData name="Magali COURTE  2702" userId="961317ee-03d6-4c84-93c6-c2df63a2da79" providerId="ADAL" clId="{FC6A9BC7-45D6-46BA-9B59-23110F03BC98}" dt="2026-05-28T13:32:27.876" v="14" actId="1076"/>
+          <ac:spMkLst>
+            <pc:docMk/>
+            <pc:sldMk cId="0" sldId="267"/>
+            <ac:spMk id="18" creationId="{00000000-0000-0000-0000-000000000000}"/>
+          </ac:spMkLst>
+        </pc:spChg>
+        <pc:spChg chg="mod">
+          <ac:chgData name="Magali COURTE  2702" userId="961317ee-03d6-4c84-93c6-c2df63a2da79" providerId="ADAL" clId="{FC6A9BC7-45D6-46BA-9B59-23110F03BC98}" dt="2026-05-28T13:32:27.876" v="14" actId="1076"/>
+          <ac:spMkLst>
+            <pc:docMk/>
+            <pc:sldMk cId="0" sldId="267"/>
+            <ac:spMk id="19" creationId="{00000000-0000-0000-0000-000000000000}"/>
+          </ac:spMkLst>
+        </pc:spChg>
+      </pc:sldChg>
+    </pc:docChg>
+  </pc:docChgLst>
+</pc:chgInfo>
 </file>
 
 <file path=ppt/notesMasters/notesMaster1.xml><?xml version="1.0" encoding="utf-8"?>
@@ -2154,6 +2326,61 @@
             </a:r>
             <a:endParaRPr lang="en-US" sz="1000" dirty="0"/>
           </a:p>
+          <a:p>
+            <a:r>
+              <a:rPr sz="600" dirty="0">
+                <a:solidFill>
+                  <a:srgbClr val="A0A0B8"/>
+                </a:solidFill>
+              </a:rPr>
+              <a:t>https://github.com/mcourte/DE_Projet_10</a:t>
+            </a:r>
+          </a:p>
+        </p:txBody>
+      </p:sp>
+      <p:sp>
+        <p:nvSpPr>
+          <p:cNvPr id="11" name="ZoneTexte 10">
+            <a:extLst>
+              <a:ext uri="{FF2B5EF4-FFF2-40B4-BE49-F238E27FC236}">
+                <a16:creationId xmlns:a16="http://schemas.microsoft.com/office/drawing/2014/main" id="{5B50DCF1-D9A1-26EA-79AB-182A4FFD65C3}"/>
+              </a:ext>
+            </a:extLst>
+          </p:cNvPr>
+          <p:cNvSpPr txBox="1"/>
+          <p:nvPr/>
+        </p:nvSpPr>
+        <p:spPr>
+          <a:xfrm>
+            <a:off x="421386" y="3755618"/>
+            <a:ext cx="5265420" cy="338554"/>
+          </a:xfrm>
+          <a:prstGeom prst="rect">
+            <a:avLst/>
+          </a:prstGeom>
+          <a:noFill/>
+        </p:spPr>
+        <p:txBody>
+          <a:bodyPr wrap="square">
+            <a:spAutoFit/>
+          </a:bodyPr>
+          <a:lstStyle/>
+          <a:p>
+            <a:r>
+              <a:rPr lang="fr-FR" sz="1600" dirty="0">
+                <a:solidFill>
+                  <a:srgbClr val="A0A0B8"/>
+                </a:solidFill>
+                <a:hlinkClick r:id="rId3"/>
+              </a:rPr>
+              <a:t>Lien GitHub</a:t>
+            </a:r>
+            <a:endParaRPr lang="fr-FR" sz="1600" dirty="0">
+              <a:solidFill>
+                <a:srgbClr val="A0A0B8"/>
+              </a:solidFill>
+            </a:endParaRPr>
+          </a:p>
         </p:txBody>
       </p:sp>
     </p:spTree>
@@ -2616,7 +2843,9 @@
                 <a:ea typeface="Consolas" pitchFamily="34" charset="-122"/>
                 <a:cs typeface="Consolas" pitchFamily="34" charset="-120"/>
               </a:rPr>
-              <a:t>├── tests/test_pipeline.py  ← 39 tests
+              <a:t>├── tests/
+│   ├── test_pipeline.py             ← 32 structurels
+│   └── test_chiffres_bottleneck.py ← 11 cibles POC
 </a:t>
             </a:r>
             <a:endParaRPr lang="en-US" sz="880" dirty="0"/>
@@ -3564,7 +3793,7 @@
                   <a:srgbClr val="FFFFFF"/>
                 </a:solidFill>
               </a:rPr>
-              <a:t>Lancer les 39 tests pytest</a:t>
+              <a:t>Lancer les 41 tests pytest</a:t>
             </a:r>
             <a:endParaRPr lang="en-US" sz="1100" dirty="0"/>
           </a:p>
@@ -3671,7 +3900,7 @@
                   <a:srgbClr val="A0A0B8"/>
                 </a:solidFill>
               </a:rPr>
-              <a:t>Montrer les 39 tests PASSED — dont les 8 tests cibles qui valident les chiffres de Stéphane</a:t>
+              <a:t>Montrer les 41 tests PASSED — dont les 11 tests cibles qui valident les chiffres de Stéphane</a:t>
             </a:r>
             <a:endParaRPr lang="en-US" sz="850" dirty="0"/>
           </a:p>
@@ -5664,7 +5893,7 @@
                   <a:srgbClr val="0D9488"/>
                 </a:solidFill>
               </a:rPr>
-              <a:t>39</a:t>
+              <a:t>41</a:t>
             </a:r>
             <a:endParaRPr lang="en-US" sz="2400" dirty="0"/>
           </a:p>
@@ -5714,7 +5943,7 @@
                   <a:srgbClr val="555577"/>
                 </a:solidFill>
               </a:rPr>
-              <a:t>validés (39/39 ✅)</a:t>
+              <a:t>validés (41/41 ✅)</a:t>
             </a:r>
             <a:endParaRPr lang="en-US" sz="950" dirty="0"/>
           </a:p>
@@ -6047,7 +6276,7 @@
                   <a:srgbClr val="FFFFFF"/>
                 </a:solidFill>
               </a:rPr>
-              <a:t>🧪  39 tests pytest validés</a:t>
+              <a:t>🧪  41 tests pytest validés</a:t>
             </a:r>
             <a:endParaRPr lang="en-US" sz="950" dirty="0"/>
           </a:p>
@@ -6083,7 +6312,7 @@
                   <a:srgbClr val="A0A0B8"/>
                 </a:solidFill>
               </a:rPr>
-              <a:t>23 unitaires + 8 cibles + 4 intégration — exécutables en continu</a:t>
+              <a:t>25 unitaires + 5 intégration + 11 cibles — exécutables en continu</a:t>
             </a:r>
             <a:endParaRPr lang="en-US" sz="850" dirty="0"/>
           </a:p>
@@ -6198,7 +6427,7 @@
         </p:nvSpPr>
         <p:spPr>
           <a:xfrm>
-            <a:off x="274320" y="1051560"/>
+            <a:off x="220980" y="2026920"/>
             <a:ext cx="4206240" cy="1719072"/>
           </a:xfrm>
           <a:prstGeom prst="rect">
@@ -6237,7 +6466,7 @@
         </p:nvSpPr>
         <p:spPr>
           <a:xfrm>
-            <a:off x="274320" y="1051560"/>
+            <a:off x="220980" y="2026920"/>
             <a:ext cx="109728" cy="1719072"/>
           </a:xfrm>
           <a:prstGeom prst="rect">
@@ -6269,7 +6498,7 @@
         </p:nvSpPr>
         <p:spPr>
           <a:xfrm>
-            <a:off x="475488" y="1143000"/>
+            <a:off x="422148" y="2118360"/>
             <a:ext cx="3895344" cy="310896"/>
           </a:xfrm>
           <a:prstGeom prst="rect">
@@ -6305,7 +6534,7 @@
         </p:nvSpPr>
         <p:spPr>
           <a:xfrm>
-            <a:off x="475488" y="1508760"/>
+            <a:off x="422148" y="2484120"/>
             <a:ext cx="3895344" cy="1170432"/>
           </a:xfrm>
           <a:prstGeom prst="rect">
@@ -6335,299 +6564,13 @@
       </p:sp>
       <p:sp>
         <p:nvSpPr>
-          <p:cNvPr id="8" name="Shape 6"/>
-          <p:cNvSpPr/>
-          <p:nvPr/>
-        </p:nvSpPr>
-        <p:spPr>
-          <a:xfrm>
-            <a:off x="4754880" y="1051560"/>
-            <a:ext cx="4206240" cy="1719072"/>
-          </a:xfrm>
-          <a:prstGeom prst="rect">
-            <a:avLst/>
-          </a:prstGeom>
-          <a:solidFill>
-            <a:srgbClr val="FFFFFF"/>
-          </a:solidFill>
-          <a:ln w="12700">
-            <a:solidFill>
-              <a:srgbClr val="7C3AED"/>
-            </a:solidFill>
-            <a:prstDash val="solid"/>
-          </a:ln>
-          <a:effectLst>
-            <a:outerShdw blurRad="101600" dist="38100" dir="8100000" algn="bl" rotWithShape="0">
-              <a:srgbClr val="000000">
-                <a:alpha val="18000"/>
-              </a:srgbClr>
-            </a:outerShdw>
-          </a:effectLst>
-        </p:spPr>
-        <p:txBody>
-          <a:bodyPr/>
-          <a:lstStyle/>
-          <a:p>
-            <a:endParaRPr lang="fr-FR"/>
-          </a:p>
-        </p:txBody>
-      </p:sp>
-      <p:sp>
-        <p:nvSpPr>
-          <p:cNvPr id="9" name="Shape 7"/>
-          <p:cNvSpPr/>
-          <p:nvPr/>
-        </p:nvSpPr>
-        <p:spPr>
-          <a:xfrm>
-            <a:off x="4754880" y="1051560"/>
-            <a:ext cx="109728" cy="1719072"/>
-          </a:xfrm>
-          <a:prstGeom prst="rect">
-            <a:avLst/>
-          </a:prstGeom>
-          <a:solidFill>
-            <a:srgbClr val="7C3AED"/>
-          </a:solidFill>
-          <a:ln w="12700">
-            <a:solidFill>
-              <a:srgbClr val="7C3AED"/>
-            </a:solidFill>
-            <a:prstDash val="solid"/>
-          </a:ln>
-        </p:spPr>
-        <p:txBody>
-          <a:bodyPr/>
-          <a:lstStyle/>
-          <a:p>
-            <a:endParaRPr lang="fr-FR"/>
-          </a:p>
-        </p:txBody>
-      </p:sp>
-      <p:sp>
-        <p:nvSpPr>
-          <p:cNvPr id="10" name="Text 8"/>
-          <p:cNvSpPr/>
-          <p:nvPr/>
-        </p:nvSpPr>
-        <p:spPr>
-          <a:xfrm>
-            <a:off x="4956048" y="1143000"/>
-            <a:ext cx="3895344" cy="310896"/>
-          </a:xfrm>
-          <a:prstGeom prst="rect">
-            <a:avLst/>
-          </a:prstGeom>
-          <a:noFill/>
-          <a:ln/>
-        </p:spPr>
-        <p:txBody>
-          <a:bodyPr wrap="square" lIns="0" tIns="0" rIns="0" bIns="0" rtlCol="0" anchor="ctr"/>
-          <a:lstStyle/>
-          <a:p>
-            <a:pPr marL="0" indent="0">
-              <a:buNone/>
-            </a:pPr>
-            <a:r>
-              <a:rPr lang="en-US" sz="1100" b="1" dirty="0">
-                <a:solidFill>
-                  <a:srgbClr val="1A1A2E"/>
-                </a:solidFill>
-              </a:rPr>
-              <a:t>📐  Choix de la méthode de classification</a:t>
-            </a:r>
-            <a:endParaRPr lang="en-US" sz="1100" dirty="0"/>
-          </a:p>
-        </p:txBody>
-      </p:sp>
-      <p:sp>
-        <p:nvSpPr>
-          <p:cNvPr id="11" name="Text 9"/>
-          <p:cNvSpPr/>
-          <p:nvPr/>
-        </p:nvSpPr>
-        <p:spPr>
-          <a:xfrm>
-            <a:off x="4956048" y="1508760"/>
-            <a:ext cx="3895344" cy="1170432"/>
-          </a:xfrm>
-          <a:prstGeom prst="rect">
-            <a:avLst/>
-          </a:prstGeom>
-          <a:noFill/>
-          <a:ln/>
-        </p:spPr>
-        <p:txBody>
-          <a:bodyPr wrap="square" lIns="0" tIns="0" rIns="0" bIns="0" rtlCol="0" anchor="ctr"/>
-          <a:lstStyle/>
-          <a:p>
-            <a:pPr marL="0" indent="0">
-              <a:buNone/>
-            </a:pPr>
-            <a:r>
-              <a:rPr lang="en-US" sz="900" dirty="0">
-                <a:solidFill>
-                  <a:srgbClr val="444466"/>
-                </a:solidFill>
-              </a:rPr>
-              <a:t>IQR boxplot → 32 vins · Z-score &gt; 1,96 → 30 vins ✅ (cible Stéphane). Seuil 1,96 = intervalle de confiance 95% sur loi normale. Sur le dataset : moy = 32,49 € · σ = 27,81 € → seuil = 87,00 €. Les deux méthodes conservées dans identify_wines.py via le paramètre method=.</a:t>
-            </a:r>
-            <a:endParaRPr lang="en-US" sz="900" dirty="0"/>
-          </a:p>
-        </p:txBody>
-      </p:sp>
-      <p:sp>
-        <p:nvSpPr>
-          <p:cNvPr id="12" name="Shape 10"/>
-          <p:cNvSpPr/>
-          <p:nvPr/>
-        </p:nvSpPr>
-        <p:spPr>
-          <a:xfrm>
-            <a:off x="274320" y="2953512"/>
-            <a:ext cx="4206240" cy="1719072"/>
-          </a:xfrm>
-          <a:prstGeom prst="rect">
-            <a:avLst/>
-          </a:prstGeom>
-          <a:solidFill>
-            <a:srgbClr val="FFFFFF"/>
-          </a:solidFill>
-          <a:ln w="12700">
-            <a:solidFill>
-              <a:srgbClr val="2563EB"/>
-            </a:solidFill>
-            <a:prstDash val="solid"/>
-          </a:ln>
-          <a:effectLst>
-            <a:outerShdw blurRad="101600" dist="38100" dir="8100000" algn="bl" rotWithShape="0">
-              <a:srgbClr val="000000">
-                <a:alpha val="18000"/>
-              </a:srgbClr>
-            </a:outerShdw>
-          </a:effectLst>
-        </p:spPr>
-        <p:txBody>
-          <a:bodyPr/>
-          <a:lstStyle/>
-          <a:p>
-            <a:endParaRPr lang="fr-FR"/>
-          </a:p>
-        </p:txBody>
-      </p:sp>
-      <p:sp>
-        <p:nvSpPr>
-          <p:cNvPr id="13" name="Shape 11"/>
-          <p:cNvSpPr/>
-          <p:nvPr/>
-        </p:nvSpPr>
-        <p:spPr>
-          <a:xfrm>
-            <a:off x="274320" y="2953512"/>
-            <a:ext cx="109728" cy="1719072"/>
-          </a:xfrm>
-          <a:prstGeom prst="rect">
-            <a:avLst/>
-          </a:prstGeom>
-          <a:solidFill>
-            <a:srgbClr val="2563EB"/>
-          </a:solidFill>
-          <a:ln w="12700">
-            <a:solidFill>
-              <a:srgbClr val="2563EB"/>
-            </a:solidFill>
-            <a:prstDash val="solid"/>
-          </a:ln>
-        </p:spPr>
-        <p:txBody>
-          <a:bodyPr/>
-          <a:lstStyle/>
-          <a:p>
-            <a:endParaRPr lang="fr-FR"/>
-          </a:p>
-        </p:txBody>
-      </p:sp>
-      <p:sp>
-        <p:nvSpPr>
-          <p:cNvPr id="14" name="Text 12"/>
-          <p:cNvSpPr/>
-          <p:nvPr/>
-        </p:nvSpPr>
-        <p:spPr>
-          <a:xfrm>
-            <a:off x="475488" y="3044952"/>
-            <a:ext cx="3895344" cy="310896"/>
-          </a:xfrm>
-          <a:prstGeom prst="rect">
-            <a:avLst/>
-          </a:prstGeom>
-          <a:noFill/>
-          <a:ln/>
-        </p:spPr>
-        <p:txBody>
-          <a:bodyPr wrap="square" lIns="0" tIns="0" rIns="0" bIns="0" rtlCol="0" anchor="ctr"/>
-          <a:lstStyle/>
-          <a:p>
-            <a:pPr marL="0" indent="0">
-              <a:buNone/>
-            </a:pPr>
-            <a:r>
-              <a:rPr lang="en-US" sz="1100" b="1" dirty="0">
-                <a:solidFill>
-                  <a:srgbClr val="1A1A2E"/>
-                </a:solidFill>
-              </a:rPr>
-              <a:t>🧪  Test du fallback CSV (monkeypatch)</a:t>
-            </a:r>
-            <a:endParaRPr lang="en-US" sz="1100" dirty="0"/>
-          </a:p>
-        </p:txBody>
-      </p:sp>
-      <p:sp>
-        <p:nvSpPr>
-          <p:cNvPr id="15" name="Text 13"/>
-          <p:cNvSpPr/>
-          <p:nvPr/>
-        </p:nvSpPr>
-        <p:spPr>
-          <a:xfrm>
-            <a:off x="475488" y="3410712"/>
-            <a:ext cx="3895344" cy="1170432"/>
-          </a:xfrm>
-          <a:prstGeom prst="rect">
-            <a:avLst/>
-          </a:prstGeom>
-          <a:noFill/>
-          <a:ln/>
-        </p:spPr>
-        <p:txBody>
-          <a:bodyPr wrap="square" lIns="0" tIns="0" rIns="0" bIns="0" rtlCol="0" anchor="ctr"/>
-          <a:lstStyle/>
-          <a:p>
-            <a:pPr marL="0" indent="0">
-              <a:buNone/>
-            </a:pPr>
-            <a:r>
-              <a:rPr lang="en-US" sz="900" dirty="0">
-                <a:solidFill>
-                  <a:srgbClr val="444466"/>
-                </a:solidFill>
-              </a:rPr>
-              <a:t>Tester une panne DuckDB sans la provoquer réellement. Problème : le monkeypatch bypassait le décorateur @_with_retry. Solution : lever DuckDBUnavailable directement dans la fonction interne pour exercer le bloc fallback du write_table externe. Leçon : tester la résilience demande autant de soin que tester le chemin nominal.</a:t>
-            </a:r>
-            <a:endParaRPr lang="en-US" sz="900" dirty="0"/>
-          </a:p>
-        </p:txBody>
-      </p:sp>
-      <p:sp>
-        <p:nvSpPr>
           <p:cNvPr id="16" name="Shape 14"/>
           <p:cNvSpPr/>
           <p:nvPr/>
         </p:nvSpPr>
         <p:spPr>
           <a:xfrm>
-            <a:off x="4754880" y="2953512"/>
+            <a:off x="4701540" y="2026920"/>
             <a:ext cx="4206240" cy="1719072"/>
           </a:xfrm>
           <a:prstGeom prst="rect">
@@ -6666,7 +6609,7 @@
         </p:nvSpPr>
         <p:spPr>
           <a:xfrm>
-            <a:off x="4754880" y="2953512"/>
+            <a:off x="4701540" y="2026920"/>
             <a:ext cx="109728" cy="1719072"/>
           </a:xfrm>
           <a:prstGeom prst="rect">
@@ -6698,7 +6641,7 @@
         </p:nvSpPr>
         <p:spPr>
           <a:xfrm>
-            <a:off x="4956048" y="3044952"/>
+            <a:off x="4902708" y="2118360"/>
             <a:ext cx="3895344" cy="310896"/>
           </a:xfrm>
           <a:prstGeom prst="rect">
@@ -6734,7 +6677,7 @@
         </p:nvSpPr>
         <p:spPr>
           <a:xfrm>
-            <a:off x="4956048" y="3410712"/>
+            <a:off x="4902708" y="2484120"/>
             <a:ext cx="3895344" cy="1170432"/>
           </a:xfrm>
           <a:prstGeom prst="rect">
@@ -7768,7 +7711,7 @@
                   <a:srgbClr val="A0A0B8"/>
                 </a:solidFill>
               </a:rPr>
-              <a:t>Exécuter automatiquement les 39 tests pytest à chaque push sur le repo pour éviter les régressions lors de modifications des scripts Python / SQL.</a:t>
+              <a:t>Exécuter automatiquement les 41 tests pytest à chaque push sur le repo pour éviter les régressions lors de modifications des scripts Python / SQL.</a:t>
             </a:r>
             <a:endParaRPr lang="en-US" sz="900" dirty="0"/>
           </a:p>
@@ -8210,7 +8153,7 @@
                   <a:srgbClr val="E8E8F0"/>
                 </a:solidFill>
               </a:rPr>
-              <a:t>🧪  32 tests pytest garantissant la qualité à chaque étape</a:t>
+              <a:t>🧪  41 tests pytest garantissant la qualité à chaque étape</a:t>
             </a:r>
             <a:endParaRPr lang="en-US" sz="1100" dirty="0"/>
           </a:p>
@@ -9369,7 +9312,7 @@
                   <a:srgbClr val="A0A0B8"/>
                 </a:solidFill>
               </a:rPr>
-              <a:t>32 tests, chiffres de référence</a:t>
+              <a:t>41 tests, chiffres de référence</a:t>
             </a:r>
             <a:endParaRPr lang="en-US" sz="950" dirty="0"/>
           </a:p>
@@ -11859,7 +11802,7 @@
                   <a:srgbClr val="FFFFFF"/>
                 </a:solidFill>
               </a:rPr>
-              <a:t>✅  pytest (32 tests)</a:t>
+              <a:t>✅  pytest (41 tests)</a:t>
             </a:r>
             <a:endParaRPr lang="en-US" sz="1100" dirty="0"/>
           </a:p>
@@ -12442,7 +12385,7 @@
                   <a:srgbClr val="FFFFFF"/>
                 </a:solidFill>
               </a:rPr>
-              <a:t>NETTOYAGE  (SQL / DuckDB)</a:t>
+              <a:t>NETTOYAGE  (Python pandas)</a:t>
             </a:r>
             <a:endParaRPr lang="en-US" sz="1100" dirty="0"/>
           </a:p>
@@ -12562,7 +12505,7 @@
                   <a:srgbClr val="FFFFFF"/>
                 </a:solidFill>
               </a:rPr>
-              <a:t>Web = 714 · ERP = 825 · 0 doublons</a:t>
+              <a:t>Unicité PK · Tables non vides · 0 doublons</a:t>
             </a:r>
             <a:endParaRPr lang="en-US" sz="850" dirty="0"/>
           </a:p>
@@ -12821,7 +12764,7 @@
                   <a:srgbClr val="FFFFFF"/>
                 </a:solidFill>
               </a:rPr>
-              <a:t>714 produits · 0 ligne orpheline</a:t>
+              <a:t>N &gt; 0 · sku unique · INNER JOIN sain</a:t>
             </a:r>
             <a:endParaRPr lang="en-US" sz="850" dirty="0"/>
           </a:p>
@@ -12960,7 +12903,7 @@
                   <a:srgbClr val="FFFFFF"/>
                 </a:solidFill>
               </a:rPr>
-              <a:t>ANALYSE  (SQL + Python IQR)</a:t>
+              <a:t>ANALYSE  (Python Z-score &gt; 1,96)</a:t>
             </a:r>
             <a:endParaRPr lang="en-US" sz="1100" dirty="0"/>
           </a:p>
@@ -13080,7 +13023,7 @@
                   <a:srgbClr val="FFFFFF"/>
                 </a:solidFill>
               </a:rPr>
-              <a:t>CA = 70 568,60 € · 30 millésimés · 684 ordin.</a:t>
+              <a:t>CA &gt; 0 · Premium + Ordinary = Total · Prix moy. P &gt; O</a:t>
             </a:r>
             <a:endParaRPr lang="en-US" sz="850" dirty="0"/>
           </a:p>
@@ -16528,7 +16471,7 @@
                   <a:srgbClr val="FFFFFF"/>
                 </a:solidFill>
               </a:rPr>
-              <a:t>06  |  Tests &amp; qualité des données — 39 tests pytest</a:t>
+              <a:t>06  |  Tests &amp; qualité des données — 41 tests pytest</a:t>
             </a:r>
             <a:endParaRPr lang="en-US" sz="2000" dirty="0"/>
           </a:p>
@@ -16564,7 +16507,7 @@
                   <a:srgbClr val="A0A0B8"/>
                 </a:solidFill>
               </a:rPr>
-              <a:t>39 tests pytest : 23 unitaires + 8 cibles métier + 4 intégration + tests SQL inline dans Kestra.</a:t>
+              <a:t>41 tests pytest : 25 unitaires + 5 intégration + 11 cibles + tests SQL inline dans Kestra.</a:t>
             </a:r>
             <a:endParaRPr lang="en-US" sz="1050" dirty="0"/>
           </a:p>

--- a/BottleNeck_Pipeline.pptx
+++ b/BottleNeck_Pipeline.pptx
@@ -3793,7 +3793,7 @@
                   <a:srgbClr val="FFFFFF"/>
                 </a:solidFill>
               </a:rPr>
-              <a:t>Lancer les 41 tests pytest</a:t>
+              <a:t>Lancer les 39 tests pytest</a:t>
             </a:r>
             <a:endParaRPr lang="en-US" sz="1100" dirty="0"/>
           </a:p>
@@ -3900,7 +3900,7 @@
                   <a:srgbClr val="A0A0B8"/>
                 </a:solidFill>
               </a:rPr>
-              <a:t>Montrer les 41 tests PASSED — dont les 11 tests cibles qui valident les chiffres de Stéphane</a:t>
+              <a:t>Montrer les 39 tests PASSED — dont les 11 tests cibles qui valident les chiffres de Stéphane</a:t>
             </a:r>
             <a:endParaRPr lang="en-US" sz="850" dirty="0"/>
           </a:p>
@@ -5893,7 +5893,7 @@
                   <a:srgbClr val="0D9488"/>
                 </a:solidFill>
               </a:rPr>
-              <a:t>41</a:t>
+              <a:t>39</a:t>
             </a:r>
             <a:endParaRPr lang="en-US" sz="2400" dirty="0"/>
           </a:p>
@@ -5943,7 +5943,7 @@
                   <a:srgbClr val="555577"/>
                 </a:solidFill>
               </a:rPr>
-              <a:t>validés (41/41 ✅)</a:t>
+              <a:t>validés (39/39 ✅)</a:t>
             </a:r>
             <a:endParaRPr lang="en-US" sz="950" dirty="0"/>
           </a:p>
@@ -6276,7 +6276,7 @@
                   <a:srgbClr val="FFFFFF"/>
                 </a:solidFill>
               </a:rPr>
-              <a:t>🧪  41 tests pytest validés</a:t>
+              <a:t>🧪  39 tests pytest validés</a:t>
             </a:r>
             <a:endParaRPr lang="en-US" sz="950" dirty="0"/>
           </a:p>
@@ -6312,7 +6312,7 @@
                   <a:srgbClr val="A0A0B8"/>
                 </a:solidFill>
               </a:rPr>
-              <a:t>25 unitaires + 5 intégration + 11 cibles — exécutables en continu</a:t>
+              <a:t>23 unitaires + 5 intégration + 11 cibles — exécutables en continu</a:t>
             </a:r>
             <a:endParaRPr lang="en-US" sz="850" dirty="0"/>
           </a:p>
@@ -7711,7 +7711,7 @@
                   <a:srgbClr val="A0A0B8"/>
                 </a:solidFill>
               </a:rPr>
-              <a:t>Exécuter automatiquement les 41 tests pytest à chaque push sur le repo pour éviter les régressions lors de modifications des scripts Python / SQL.</a:t>
+              <a:t>Exécuter automatiquement les 39 tests pytest à chaque push sur le repo pour éviter les régressions lors de modifications des scripts Python / SQL.</a:t>
             </a:r>
             <a:endParaRPr lang="en-US" sz="900" dirty="0"/>
           </a:p>
@@ -8153,7 +8153,7 @@
                   <a:srgbClr val="E8E8F0"/>
                 </a:solidFill>
               </a:rPr>
-              <a:t>🧪  41 tests pytest garantissant la qualité à chaque étape</a:t>
+              <a:t>🧪  39 tests pytest garantissant la qualité à chaque étape</a:t>
             </a:r>
             <a:endParaRPr lang="en-US" sz="1100" dirty="0"/>
           </a:p>
@@ -9312,7 +9312,7 @@
                   <a:srgbClr val="A0A0B8"/>
                 </a:solidFill>
               </a:rPr>
-              <a:t>41 tests, chiffres de référence</a:t>
+              <a:t>39 tests, chiffres de référence</a:t>
             </a:r>
             <a:endParaRPr lang="en-US" sz="950" dirty="0"/>
           </a:p>
@@ -11802,7 +11802,7 @@
                   <a:srgbClr val="FFFFFF"/>
                 </a:solidFill>
               </a:rPr>
-              <a:t>✅  pytest (41 tests)</a:t>
+              <a:t>✅  pytest (39 tests)</a:t>
             </a:r>
             <a:endParaRPr lang="en-US" sz="1100" dirty="0"/>
           </a:p>
@@ -16471,7 +16471,7 @@
                   <a:srgbClr val="FFFFFF"/>
                 </a:solidFill>
               </a:rPr>
-              <a:t>06  |  Tests &amp; qualité des données — 41 tests pytest</a:t>
+              <a:t>06  |  Tests &amp; qualité des données — 39 tests pytest</a:t>
             </a:r>
             <a:endParaRPr lang="en-US" sz="2000" dirty="0"/>
           </a:p>
@@ -16507,7 +16507,7 @@
                   <a:srgbClr val="A0A0B8"/>
                 </a:solidFill>
               </a:rPr>
-              <a:t>41 tests pytest : 25 unitaires + 5 intégration + 11 cibles + tests SQL inline dans Kestra.</a:t>
+              <a:t>39 tests pytest : 23 unitaires + 5 intégration + 11 cibles + tests SQL inline dans Kestra.</a:t>
             </a:r>
             <a:endParaRPr lang="en-US" sz="1050" dirty="0"/>
           </a:p>
